--- a/(3.12) ..pptx
+++ b/(3.12) ..pptx
@@ -6,6 +6,7 @@
   </p:sldMasterIdLst>
   <p:sldIdLst>
     <p:sldId id="257" r:id="rId2"/>
+    <p:sldId id="258" r:id="rId3"/>
   </p:sldIdLst>
   <p:sldSz cx="12192000" cy="6858000"/>
   <p:notesSz cx="6858000" cy="9144000"/>
@@ -104,6 +105,11 @@
       </a:defRPr>
     </a:lvl9pPr>
   </p:defaultTextStyle>
+  <p:extLst>
+    <p:ext uri="{EFAFB233-063F-42B5-8137-9DF3F51BA10A}">
+      <p15:sldGuideLst xmlns:p15="http://schemas.microsoft.com/office/powerpoint/2012/main"/>
+    </p:ext>
+  </p:extLst>
 </p:presentation>
 </file>
 
@@ -112,7 +118,7 @@
   <pc:docChgLst>
     <pc:chgData name="musukie52@gmail.com" userId="017bd91f96aa8751" providerId="LiveId" clId="{5B2C3894-F97E-4CAB-8812-5BB4D83AAC6A}"/>
     <pc:docChg chg="addSld delSld modSld">
-      <pc:chgData name="musukie52@gmail.com" userId="017bd91f96aa8751" providerId="LiveId" clId="{5B2C3894-F97E-4CAB-8812-5BB4D83AAC6A}" dt="2026-03-12T05:02:22.825" v="106" actId="20577"/>
+      <pc:chgData name="musukie52@gmail.com" userId="017bd91f96aa8751" providerId="LiveId" clId="{5B2C3894-F97E-4CAB-8812-5BB4D83AAC6A}" dt="2026-03-12T05:03:42.666" v="192" actId="20577"/>
       <pc:docMkLst>
         <pc:docMk/>
       </pc:docMkLst>
@@ -124,7 +130,7 @@
         </pc:sldMkLst>
       </pc:sldChg>
       <pc:sldChg chg="modSp new mod">
-        <pc:chgData name="musukie52@gmail.com" userId="017bd91f96aa8751" providerId="LiveId" clId="{5B2C3894-F97E-4CAB-8812-5BB4D83AAC6A}" dt="2026-03-12T05:02:22.825" v="106" actId="20577"/>
+        <pc:chgData name="musukie52@gmail.com" userId="017bd91f96aa8751" providerId="LiveId" clId="{5B2C3894-F97E-4CAB-8812-5BB4D83AAC6A}" dt="2026-03-12T05:03:42.666" v="192" actId="20577"/>
         <pc:sldMkLst>
           <pc:docMk/>
           <pc:sldMk cId="2848884687" sldId="257"/>
@@ -138,13 +144,20 @@
           </ac:spMkLst>
         </pc:spChg>
         <pc:spChg chg="mod">
-          <ac:chgData name="musukie52@gmail.com" userId="017bd91f96aa8751" providerId="LiveId" clId="{5B2C3894-F97E-4CAB-8812-5BB4D83AAC6A}" dt="2026-03-12T05:02:22.825" v="106" actId="20577"/>
+          <ac:chgData name="musukie52@gmail.com" userId="017bd91f96aa8751" providerId="LiveId" clId="{5B2C3894-F97E-4CAB-8812-5BB4D83AAC6A}" dt="2026-03-12T05:03:42.666" v="192" actId="20577"/>
           <ac:spMkLst>
             <pc:docMk/>
             <pc:sldMk cId="2848884687" sldId="257"/>
             <ac:spMk id="3" creationId="{952B1FA5-E270-2670-2536-C541CAC1D530}"/>
           </ac:spMkLst>
         </pc:spChg>
+      </pc:sldChg>
+      <pc:sldChg chg="new">
+        <pc:chgData name="musukie52@gmail.com" userId="017bd91f96aa8751" providerId="LiveId" clId="{5B2C3894-F97E-4CAB-8812-5BB4D83AAC6A}" dt="2026-03-12T05:03:25.230" v="107" actId="680"/>
+        <pc:sldMkLst>
+          <pc:docMk/>
+          <pc:sldMk cId="3197153169" sldId="258"/>
+        </pc:sldMkLst>
       </pc:sldChg>
     </pc:docChg>
   </pc:docChgLst>
@@ -3419,10 +3432,23 @@
               <a:t>기획자는 유니티 활용 기술에 대해서 따로 적어야 한다</a:t>
             </a:r>
             <a:r>
-              <a:rPr lang="en-US" altLang="ko-KR"/>
+              <a:rPr lang="en-US" altLang="ko-KR" dirty="0"/>
               <a:t>.</a:t>
             </a:r>
-            <a:endParaRPr lang="ko-KR" altLang="en-US"/>
+          </a:p>
+          <a:p>
+            <a:endParaRPr lang="en-US" altLang="ko-KR" dirty="0"/>
+          </a:p>
+          <a:p>
+            <a:r>
+              <a:rPr lang="ko-KR" altLang="en-US" dirty="0"/>
+              <a:t>아트 디자이너들은 포트폴리오에 활용해야 한다</a:t>
+            </a:r>
+            <a:r>
+              <a:rPr lang="en-US" altLang="ko-KR" dirty="0"/>
+              <a:t>.</a:t>
+            </a:r>
+            <a:endParaRPr lang="ko-KR" altLang="en-US" dirty="0"/>
           </a:p>
         </p:txBody>
       </p:sp>
@@ -3430,6 +3456,86 @@
     <p:extLst>
       <p:ext uri="{BB962C8B-B14F-4D97-AF65-F5344CB8AC3E}">
         <p14:creationId xmlns:p14="http://schemas.microsoft.com/office/powerpoint/2010/main" val="2848884687"/>
+      </p:ext>
+    </p:extLst>
+  </p:cSld>
+  <p:clrMapOvr>
+    <a:masterClrMapping/>
+  </p:clrMapOvr>
+</p:sld>
+</file>
+
+<file path=ppt/slides/slide2.xml><?xml version="1.0" encoding="utf-8"?>
+<p:sld xmlns:a="http://schemas.openxmlformats.org/drawingml/2006/main" xmlns:r="http://schemas.openxmlformats.org/officeDocument/2006/relationships" xmlns:p="http://schemas.openxmlformats.org/presentationml/2006/main">
+  <p:cSld>
+    <p:spTree>
+      <p:nvGrpSpPr>
+        <p:cNvPr id="1" name=""/>
+        <p:cNvGrpSpPr/>
+        <p:nvPr/>
+      </p:nvGrpSpPr>
+      <p:grpSpPr>
+        <a:xfrm>
+          <a:off x="0" y="0"/>
+          <a:ext cx="0" cy="0"/>
+          <a:chOff x="0" y="0"/>
+          <a:chExt cx="0" cy="0"/>
+        </a:xfrm>
+      </p:grpSpPr>
+      <p:sp>
+        <p:nvSpPr>
+          <p:cNvPr id="2" name="제목 1">
+            <a:extLst>
+              <a:ext uri="{FF2B5EF4-FFF2-40B4-BE49-F238E27FC236}">
+                <a16:creationId xmlns:a16="http://schemas.microsoft.com/office/drawing/2014/main" id="{B19D1D0C-C0EE-1273-B1B0-29E96FD5B62A}"/>
+              </a:ext>
+            </a:extLst>
+          </p:cNvPr>
+          <p:cNvSpPr>
+            <a:spLocks noGrp="1"/>
+          </p:cNvSpPr>
+          <p:nvPr>
+            <p:ph type="title"/>
+          </p:nvPr>
+        </p:nvSpPr>
+        <p:spPr/>
+        <p:txBody>
+          <a:bodyPr/>
+          <a:lstStyle/>
+          <a:p>
+            <a:endParaRPr lang="ko-KR" altLang="en-US"/>
+          </a:p>
+        </p:txBody>
+      </p:sp>
+      <p:sp>
+        <p:nvSpPr>
+          <p:cNvPr id="3" name="내용 개체 틀 2">
+            <a:extLst>
+              <a:ext uri="{FF2B5EF4-FFF2-40B4-BE49-F238E27FC236}">
+                <a16:creationId xmlns:a16="http://schemas.microsoft.com/office/drawing/2014/main" id="{A79A4AC9-398B-8FE4-6DFB-987516F186E3}"/>
+              </a:ext>
+            </a:extLst>
+          </p:cNvPr>
+          <p:cNvSpPr>
+            <a:spLocks noGrp="1"/>
+          </p:cNvSpPr>
+          <p:nvPr>
+            <p:ph idx="1"/>
+          </p:nvPr>
+        </p:nvSpPr>
+        <p:spPr/>
+        <p:txBody>
+          <a:bodyPr/>
+          <a:lstStyle/>
+          <a:p>
+            <a:endParaRPr lang="ko-KR" altLang="en-US"/>
+          </a:p>
+        </p:txBody>
+      </p:sp>
+    </p:spTree>
+    <p:extLst>
+      <p:ext uri="{BB962C8B-B14F-4D97-AF65-F5344CB8AC3E}">
+        <p14:creationId xmlns:p14="http://schemas.microsoft.com/office/powerpoint/2010/main" val="3197153169"/>
       </p:ext>
     </p:extLst>
   </p:cSld>

--- a/(3.12) ..pptx
+++ b/(3.12) ..pptx
@@ -7,6 +7,12 @@
   <p:sldIdLst>
     <p:sldId id="257" r:id="rId2"/>
     <p:sldId id="258" r:id="rId3"/>
+    <p:sldId id="259" r:id="rId4"/>
+    <p:sldId id="260" r:id="rId5"/>
+    <p:sldId id="261" r:id="rId6"/>
+    <p:sldId id="262" r:id="rId7"/>
+    <p:sldId id="263" r:id="rId8"/>
+    <p:sldId id="264" r:id="rId9"/>
   </p:sldIdLst>
   <p:sldSz cx="12192000" cy="6858000"/>
   <p:notesSz cx="6858000" cy="9144000"/>
@@ -117,8 +123,8 @@
 <pc:chgInfo xmlns:a="http://schemas.openxmlformats.org/drawingml/2006/main" xmlns:r="http://schemas.openxmlformats.org/officeDocument/2006/relationships" xmlns:ac="http://schemas.microsoft.com/office/drawing/2013/main/command" xmlns:pc="http://schemas.microsoft.com/office/powerpoint/2013/main/command">
   <pc:docChgLst>
     <pc:chgData name="musukie52@gmail.com" userId="017bd91f96aa8751" providerId="LiveId" clId="{5B2C3894-F97E-4CAB-8812-5BB4D83AAC6A}"/>
-    <pc:docChg chg="addSld delSld modSld">
-      <pc:chgData name="musukie52@gmail.com" userId="017bd91f96aa8751" providerId="LiveId" clId="{5B2C3894-F97E-4CAB-8812-5BB4D83AAC6A}" dt="2026-03-12T05:03:42.666" v="192" actId="20577"/>
+    <pc:docChg chg="undo custSel addSld delSld modSld">
+      <pc:chgData name="musukie52@gmail.com" userId="017bd91f96aa8751" providerId="LiveId" clId="{5B2C3894-F97E-4CAB-8812-5BB4D83AAC6A}" dt="2026-03-12T06:47:49.806" v="3828" actId="20577"/>
       <pc:docMkLst>
         <pc:docMk/>
       </pc:docMkLst>
@@ -152,12 +158,166 @@
           </ac:spMkLst>
         </pc:spChg>
       </pc:sldChg>
-      <pc:sldChg chg="new">
-        <pc:chgData name="musukie52@gmail.com" userId="017bd91f96aa8751" providerId="LiveId" clId="{5B2C3894-F97E-4CAB-8812-5BB4D83AAC6A}" dt="2026-03-12T05:03:25.230" v="107" actId="680"/>
+      <pc:sldChg chg="modSp new mod">
+        <pc:chgData name="musukie52@gmail.com" userId="017bd91f96aa8751" providerId="LiveId" clId="{5B2C3894-F97E-4CAB-8812-5BB4D83AAC6A}" dt="2026-03-12T06:05:49.439" v="2191" actId="27636"/>
         <pc:sldMkLst>
           <pc:docMk/>
           <pc:sldMk cId="3197153169" sldId="258"/>
         </pc:sldMkLst>
+        <pc:spChg chg="mod">
+          <ac:chgData name="musukie52@gmail.com" userId="017bd91f96aa8751" providerId="LiveId" clId="{5B2C3894-F97E-4CAB-8812-5BB4D83AAC6A}" dt="2026-03-12T05:46:51.212" v="199" actId="20577"/>
+          <ac:spMkLst>
+            <pc:docMk/>
+            <pc:sldMk cId="3197153169" sldId="258"/>
+            <ac:spMk id="2" creationId="{B19D1D0C-C0EE-1273-B1B0-29E96FD5B62A}"/>
+          </ac:spMkLst>
+        </pc:spChg>
+        <pc:spChg chg="mod">
+          <ac:chgData name="musukie52@gmail.com" userId="017bd91f96aa8751" providerId="LiveId" clId="{5B2C3894-F97E-4CAB-8812-5BB4D83AAC6A}" dt="2026-03-12T06:05:49.439" v="2191" actId="27636"/>
+          <ac:spMkLst>
+            <pc:docMk/>
+            <pc:sldMk cId="3197153169" sldId="258"/>
+            <ac:spMk id="3" creationId="{A79A4AC9-398B-8FE4-6DFB-987516F186E3}"/>
+          </ac:spMkLst>
+        </pc:spChg>
+      </pc:sldChg>
+      <pc:sldChg chg="modSp new mod">
+        <pc:chgData name="musukie52@gmail.com" userId="017bd91f96aa8751" providerId="LiveId" clId="{5B2C3894-F97E-4CAB-8812-5BB4D83AAC6A}" dt="2026-03-12T06:05:34.566" v="2128" actId="20577"/>
+        <pc:sldMkLst>
+          <pc:docMk/>
+          <pc:sldMk cId="2434825662" sldId="259"/>
+        </pc:sldMkLst>
+        <pc:spChg chg="mod">
+          <ac:chgData name="musukie52@gmail.com" userId="017bd91f96aa8751" providerId="LiveId" clId="{5B2C3894-F97E-4CAB-8812-5BB4D83AAC6A}" dt="2026-03-12T06:05:33.419" v="2125" actId="6549"/>
+          <ac:spMkLst>
+            <pc:docMk/>
+            <pc:sldMk cId="2434825662" sldId="259"/>
+            <ac:spMk id="2" creationId="{535AB401-14EF-6929-E499-A78A209F39E2}"/>
+          </ac:spMkLst>
+        </pc:spChg>
+        <pc:spChg chg="mod">
+          <ac:chgData name="musukie52@gmail.com" userId="017bd91f96aa8751" providerId="LiveId" clId="{5B2C3894-F97E-4CAB-8812-5BB4D83AAC6A}" dt="2026-03-12T06:05:34.566" v="2128" actId="20577"/>
+          <ac:spMkLst>
+            <pc:docMk/>
+            <pc:sldMk cId="2434825662" sldId="259"/>
+            <ac:spMk id="3" creationId="{100259CD-C05E-8BFA-C9B8-71D099765EE3}"/>
+          </ac:spMkLst>
+        </pc:spChg>
+      </pc:sldChg>
+      <pc:sldChg chg="modSp new mod">
+        <pc:chgData name="musukie52@gmail.com" userId="017bd91f96aa8751" providerId="LiveId" clId="{5B2C3894-F97E-4CAB-8812-5BB4D83AAC6A}" dt="2026-03-12T05:59:51.065" v="2087" actId="20577"/>
+        <pc:sldMkLst>
+          <pc:docMk/>
+          <pc:sldMk cId="1455306431" sldId="260"/>
+        </pc:sldMkLst>
+        <pc:spChg chg="mod">
+          <ac:chgData name="musukie52@gmail.com" userId="017bd91f96aa8751" providerId="LiveId" clId="{5B2C3894-F97E-4CAB-8812-5BB4D83AAC6A}" dt="2026-03-12T05:58:54.783" v="1812" actId="20577"/>
+          <ac:spMkLst>
+            <pc:docMk/>
+            <pc:sldMk cId="1455306431" sldId="260"/>
+            <ac:spMk id="2" creationId="{C6E2C465-F1D8-AB20-D10D-FF1DE8499B6A}"/>
+          </ac:spMkLst>
+        </pc:spChg>
+        <pc:spChg chg="mod">
+          <ac:chgData name="musukie52@gmail.com" userId="017bd91f96aa8751" providerId="LiveId" clId="{5B2C3894-F97E-4CAB-8812-5BB4D83AAC6A}" dt="2026-03-12T05:59:51.065" v="2087" actId="20577"/>
+          <ac:spMkLst>
+            <pc:docMk/>
+            <pc:sldMk cId="1455306431" sldId="260"/>
+            <ac:spMk id="3" creationId="{B6A03E72-1064-C060-66CA-262A63EA014C}"/>
+          </ac:spMkLst>
+        </pc:spChg>
+      </pc:sldChg>
+      <pc:sldChg chg="modSp new mod">
+        <pc:chgData name="musukie52@gmail.com" userId="017bd91f96aa8751" providerId="LiveId" clId="{5B2C3894-F97E-4CAB-8812-5BB4D83AAC6A}" dt="2026-03-12T06:21:39.622" v="3010" actId="20577"/>
+        <pc:sldMkLst>
+          <pc:docMk/>
+          <pc:sldMk cId="678700671" sldId="261"/>
+        </pc:sldMkLst>
+        <pc:spChg chg="mod">
+          <ac:chgData name="musukie52@gmail.com" userId="017bd91f96aa8751" providerId="LiveId" clId="{5B2C3894-F97E-4CAB-8812-5BB4D83AAC6A}" dt="2026-03-12T06:13:46.649" v="2208" actId="20577"/>
+          <ac:spMkLst>
+            <pc:docMk/>
+            <pc:sldMk cId="678700671" sldId="261"/>
+            <ac:spMk id="2" creationId="{5367CB9D-071D-7DB7-E18C-9890BE5C8055}"/>
+          </ac:spMkLst>
+        </pc:spChg>
+        <pc:spChg chg="mod">
+          <ac:chgData name="musukie52@gmail.com" userId="017bd91f96aa8751" providerId="LiveId" clId="{5B2C3894-F97E-4CAB-8812-5BB4D83AAC6A}" dt="2026-03-12T06:21:39.622" v="3010" actId="20577"/>
+          <ac:spMkLst>
+            <pc:docMk/>
+            <pc:sldMk cId="678700671" sldId="261"/>
+            <ac:spMk id="3" creationId="{FE00A7BE-59B8-A631-2F45-CFE7DEECEAD2}"/>
+          </ac:spMkLst>
+        </pc:spChg>
+      </pc:sldChg>
+      <pc:sldChg chg="modSp new mod">
+        <pc:chgData name="musukie52@gmail.com" userId="017bd91f96aa8751" providerId="LiveId" clId="{5B2C3894-F97E-4CAB-8812-5BB4D83AAC6A}" dt="2026-03-12T06:23:55.856" v="3549" actId="20577"/>
+        <pc:sldMkLst>
+          <pc:docMk/>
+          <pc:sldMk cId="1572706785" sldId="262"/>
+        </pc:sldMkLst>
+        <pc:spChg chg="mod">
+          <ac:chgData name="musukie52@gmail.com" userId="017bd91f96aa8751" providerId="LiveId" clId="{5B2C3894-F97E-4CAB-8812-5BB4D83AAC6A}" dt="2026-03-12T06:22:19.722" v="3019" actId="20577"/>
+          <ac:spMkLst>
+            <pc:docMk/>
+            <pc:sldMk cId="1572706785" sldId="262"/>
+            <ac:spMk id="2" creationId="{C13CFDDF-626F-5969-4F67-F1C0C6BE2B13}"/>
+          </ac:spMkLst>
+        </pc:spChg>
+        <pc:spChg chg="mod">
+          <ac:chgData name="musukie52@gmail.com" userId="017bd91f96aa8751" providerId="LiveId" clId="{5B2C3894-F97E-4CAB-8812-5BB4D83AAC6A}" dt="2026-03-12T06:23:55.856" v="3549" actId="20577"/>
+          <ac:spMkLst>
+            <pc:docMk/>
+            <pc:sldMk cId="1572706785" sldId="262"/>
+            <ac:spMk id="3" creationId="{D3F0A463-6051-52BB-881B-DF52B50D5C4B}"/>
+          </ac:spMkLst>
+        </pc:spChg>
+      </pc:sldChg>
+      <pc:sldChg chg="modSp new mod">
+        <pc:chgData name="musukie52@gmail.com" userId="017bd91f96aa8751" providerId="LiveId" clId="{5B2C3894-F97E-4CAB-8812-5BB4D83AAC6A}" dt="2026-03-12T06:28:36.290" v="3783" actId="20577"/>
+        <pc:sldMkLst>
+          <pc:docMk/>
+          <pc:sldMk cId="3430836320" sldId="263"/>
+        </pc:sldMkLst>
+        <pc:spChg chg="mod">
+          <ac:chgData name="musukie52@gmail.com" userId="017bd91f96aa8751" providerId="LiveId" clId="{5B2C3894-F97E-4CAB-8812-5BB4D83AAC6A}" dt="2026-03-12T06:28:01.186" v="3597" actId="20577"/>
+          <ac:spMkLst>
+            <pc:docMk/>
+            <pc:sldMk cId="3430836320" sldId="263"/>
+            <ac:spMk id="2" creationId="{1D3DC655-7E31-4E15-22B8-4B542CB1555A}"/>
+          </ac:spMkLst>
+        </pc:spChg>
+        <pc:spChg chg="mod">
+          <ac:chgData name="musukie52@gmail.com" userId="017bd91f96aa8751" providerId="LiveId" clId="{5B2C3894-F97E-4CAB-8812-5BB4D83AAC6A}" dt="2026-03-12T06:28:36.290" v="3783" actId="20577"/>
+          <ac:spMkLst>
+            <pc:docMk/>
+            <pc:sldMk cId="3430836320" sldId="263"/>
+            <ac:spMk id="3" creationId="{26E9613B-D2AF-133E-9B48-1E4B055B7AA9}"/>
+          </ac:spMkLst>
+        </pc:spChg>
+      </pc:sldChg>
+      <pc:sldChg chg="modSp new mod">
+        <pc:chgData name="musukie52@gmail.com" userId="017bd91f96aa8751" providerId="LiveId" clId="{5B2C3894-F97E-4CAB-8812-5BB4D83AAC6A}" dt="2026-03-12T06:47:49.806" v="3828" actId="20577"/>
+        <pc:sldMkLst>
+          <pc:docMk/>
+          <pc:sldMk cId="2663456249" sldId="264"/>
+        </pc:sldMkLst>
+        <pc:spChg chg="mod">
+          <ac:chgData name="musukie52@gmail.com" userId="017bd91f96aa8751" providerId="LiveId" clId="{5B2C3894-F97E-4CAB-8812-5BB4D83AAC6A}" dt="2026-03-12T06:47:21.972" v="3793" actId="20577"/>
+          <ac:spMkLst>
+            <pc:docMk/>
+            <pc:sldMk cId="2663456249" sldId="264"/>
+            <ac:spMk id="2" creationId="{D9DA8B8B-9901-E00B-3E8B-2E849C9BB149}"/>
+          </ac:spMkLst>
+        </pc:spChg>
+        <pc:spChg chg="mod">
+          <ac:chgData name="musukie52@gmail.com" userId="017bd91f96aa8751" providerId="LiveId" clId="{5B2C3894-F97E-4CAB-8812-5BB4D83AAC6A}" dt="2026-03-12T06:47:49.806" v="3828" actId="20577"/>
+          <ac:spMkLst>
+            <pc:docMk/>
+            <pc:sldMk cId="2663456249" sldId="264"/>
+            <ac:spMk id="3" creationId="{5F5E4B54-53D2-FF3C-F5BB-D900EA054073}"/>
+          </ac:spMkLst>
+        </pc:spChg>
       </pc:sldChg>
     </pc:docChg>
   </pc:docChgLst>
@@ -3503,7 +3663,11 @@
           <a:bodyPr/>
           <a:lstStyle/>
           <a:p>
-            <a:endParaRPr lang="ko-KR" altLang="en-US"/>
+            <a:r>
+              <a:rPr lang="en-US" altLang="ko-KR" dirty="0"/>
+              <a:t>UI</a:t>
+            </a:r>
+            <a:endParaRPr lang="ko-KR" altLang="en-US" dirty="0"/>
           </a:p>
         </p:txBody>
       </p:sp>
@@ -3523,12 +3687,233 @@
             <p:ph idx="1"/>
           </p:nvPr>
         </p:nvSpPr>
-        <p:spPr/>
-        <p:txBody>
-          <a:bodyPr/>
-          <a:lstStyle/>
-          <a:p>
-            <a:endParaRPr lang="ko-KR" altLang="en-US"/>
+        <p:spPr>
+          <a:xfrm>
+            <a:off x="838200" y="1509713"/>
+            <a:ext cx="10515600" cy="4983162"/>
+          </a:xfrm>
+        </p:spPr>
+        <p:txBody>
+          <a:bodyPr>
+            <a:normAutofit fontScale="92500" lnSpcReduction="10000"/>
+          </a:bodyPr>
+          <a:lstStyle/>
+          <a:p>
+            <a:r>
+              <a:rPr lang="en-US" altLang="ko-KR" dirty="0"/>
+              <a:t>Canvas : </a:t>
+            </a:r>
+            <a:r>
+              <a:rPr lang="ko-KR" altLang="en-US" dirty="0"/>
+              <a:t>다른 </a:t>
+            </a:r>
+            <a:r>
+              <a:rPr lang="en-US" altLang="ko-KR" dirty="0"/>
+              <a:t>UI</a:t>
+            </a:r>
+            <a:r>
+              <a:rPr lang="ko-KR" altLang="en-US" dirty="0"/>
+              <a:t>오브젝트들의 가장 최상위 오브젝트가 된다</a:t>
+            </a:r>
+            <a:r>
+              <a:rPr lang="en-US" altLang="ko-KR" dirty="0"/>
+              <a:t>. </a:t>
+            </a:r>
+            <a:r>
+              <a:rPr lang="ko-KR" altLang="en-US" dirty="0"/>
+              <a:t>즉</a:t>
+            </a:r>
+            <a:r>
+              <a:rPr lang="en-US" altLang="ko-KR" dirty="0"/>
+              <a:t>, </a:t>
+            </a:r>
+            <a:r>
+              <a:rPr lang="ko-KR" altLang="en-US" dirty="0"/>
+              <a:t>이 오브젝트 하위에 다른  </a:t>
+            </a:r>
+            <a:r>
+              <a:rPr lang="en-US" altLang="ko-KR" dirty="0"/>
+              <a:t>UI</a:t>
+            </a:r>
+            <a:r>
+              <a:rPr lang="ko-KR" altLang="en-US" dirty="0"/>
+              <a:t> 오브젝트들을 만들게 된다</a:t>
+            </a:r>
+            <a:r>
+              <a:rPr lang="en-US" altLang="ko-KR" dirty="0"/>
+              <a:t>. </a:t>
+            </a:r>
+            <a:r>
+              <a:rPr lang="ko-KR" altLang="en-US" dirty="0"/>
+              <a:t>다른 </a:t>
+            </a:r>
+            <a:r>
+              <a:rPr lang="en-US" altLang="ko-KR" dirty="0"/>
+              <a:t>UI </a:t>
+            </a:r>
+            <a:r>
+              <a:rPr lang="ko-KR" altLang="en-US" dirty="0"/>
+              <a:t>오브젝트를 이 오브젝트 하위에 만들지 않으면</a:t>
+            </a:r>
+            <a:r>
+              <a:rPr lang="en-US" altLang="ko-KR" dirty="0"/>
+              <a:t>, </a:t>
+            </a:r>
+            <a:r>
+              <a:rPr lang="ko-KR" altLang="en-US" dirty="0"/>
+              <a:t>월드 공간에 생성되어 해당 </a:t>
+            </a:r>
+            <a:r>
+              <a:rPr lang="en-US" altLang="ko-KR" dirty="0"/>
+              <a:t>UI </a:t>
+            </a:r>
+            <a:r>
+              <a:rPr lang="ko-KR" altLang="en-US" dirty="0"/>
+              <a:t>오브젝트는 보이지 않게 된다</a:t>
+            </a:r>
+            <a:r>
+              <a:rPr lang="en-US" altLang="ko-KR" dirty="0"/>
+              <a:t>.</a:t>
+            </a:r>
+            <a:br>
+              <a:rPr lang="en-US" altLang="ko-KR" dirty="0"/>
+            </a:br>
+            <a:endParaRPr lang="en-US" altLang="ko-KR" dirty="0"/>
+          </a:p>
+          <a:p>
+            <a:r>
+              <a:rPr lang="en-US" altLang="ko-KR" dirty="0"/>
+              <a:t>Overlay </a:t>
+            </a:r>
+            <a:r>
+              <a:rPr lang="ko-KR" altLang="en-US" dirty="0"/>
+              <a:t>속성 </a:t>
+            </a:r>
+            <a:r>
+              <a:rPr lang="en-US" altLang="ko-KR" dirty="0"/>
+              <a:t>: </a:t>
+            </a:r>
+            <a:r>
+              <a:rPr lang="ko-KR" altLang="en-US" dirty="0"/>
+              <a:t>다른 모든 오브젝트들 위에 그려지는 것</a:t>
+            </a:r>
+            <a:r>
+              <a:rPr lang="en-US" altLang="ko-KR" dirty="0"/>
+              <a:t>. </a:t>
+            </a:r>
+            <a:r>
+              <a:rPr lang="ko-KR" altLang="en-US" dirty="0"/>
+              <a:t>즉</a:t>
+            </a:r>
+            <a:r>
+              <a:rPr lang="en-US" altLang="ko-KR" dirty="0"/>
+              <a:t>, </a:t>
+            </a:r>
+            <a:r>
+              <a:rPr lang="ko-KR" altLang="en-US" dirty="0"/>
+              <a:t>캐릭터</a:t>
+            </a:r>
+            <a:r>
+              <a:rPr lang="en-US" altLang="ko-KR" dirty="0"/>
+              <a:t>, </a:t>
+            </a:r>
+            <a:r>
+              <a:rPr lang="ko-KR" altLang="en-US" dirty="0"/>
+              <a:t>배경</a:t>
+            </a:r>
+            <a:r>
+              <a:rPr lang="en-US" altLang="ko-KR" dirty="0"/>
+              <a:t>, </a:t>
+            </a:r>
+            <a:r>
+              <a:rPr lang="ko-KR" altLang="en-US" dirty="0"/>
+              <a:t>몬스터 등 다른 오브젝트들보다 앞에 그려지므로</a:t>
+            </a:r>
+            <a:r>
+              <a:rPr lang="en-US" altLang="ko-KR" dirty="0"/>
+              <a:t>, </a:t>
+            </a:r>
+            <a:r>
+              <a:rPr lang="ko-KR" altLang="en-US" dirty="0"/>
+              <a:t>가장 앞에서 화면에 나타나게 된다</a:t>
+            </a:r>
+            <a:r>
+              <a:rPr lang="en-US" altLang="ko-KR" dirty="0"/>
+              <a:t>. </a:t>
+            </a:r>
+            <a:r>
+              <a:rPr lang="ko-KR" altLang="en-US" dirty="0"/>
+              <a:t>다른 오브젝트들을 덮는다는 것</a:t>
+            </a:r>
+            <a:r>
+              <a:rPr lang="en-US" altLang="ko-KR" dirty="0"/>
+              <a:t>.</a:t>
+            </a:r>
+          </a:p>
+          <a:p>
+            <a:endParaRPr lang="en-US" altLang="ko-KR" dirty="0"/>
+          </a:p>
+          <a:p>
+            <a:r>
+              <a:rPr lang="ko-KR" altLang="en-US" dirty="0"/>
+              <a:t>앵커 </a:t>
+            </a:r>
+            <a:r>
+              <a:rPr lang="en-US" altLang="ko-KR" dirty="0"/>
+              <a:t>: </a:t>
+            </a:r>
+            <a:r>
+              <a:rPr lang="ko-KR" altLang="en-US" dirty="0"/>
+              <a:t>해상도가 </a:t>
+            </a:r>
+            <a:r>
+              <a:rPr lang="ko-KR" altLang="en-US" dirty="0" err="1"/>
+              <a:t>바껴도</a:t>
+            </a:r>
+            <a:r>
+              <a:rPr lang="ko-KR" altLang="en-US" dirty="0"/>
+              <a:t> 이미지의 해상도 또한 거기에 맞춰서 대응된다</a:t>
+            </a:r>
+            <a:r>
+              <a:rPr lang="en-US" altLang="ko-KR" dirty="0"/>
+              <a:t>. </a:t>
+            </a:r>
+            <a:r>
+              <a:rPr lang="ko-KR" altLang="en-US" dirty="0"/>
+              <a:t>즉</a:t>
+            </a:r>
+            <a:r>
+              <a:rPr lang="en-US" altLang="ko-KR" dirty="0"/>
+              <a:t>, </a:t>
+            </a:r>
+            <a:r>
+              <a:rPr lang="ko-KR" altLang="en-US" dirty="0"/>
+              <a:t>풀 화면으로 앵커를 </a:t>
+            </a:r>
+            <a:r>
+              <a:rPr lang="ko-KR" altLang="en-US" dirty="0" err="1"/>
+              <a:t>맞춰놓으면</a:t>
+            </a:r>
+            <a:r>
+              <a:rPr lang="ko-KR" altLang="en-US" dirty="0"/>
+              <a:t> 이미지의 크기와 상관없이 해상도에 따라 이미지의 해상도도 맞춰진다</a:t>
+            </a:r>
+            <a:r>
+              <a:rPr lang="en-US" altLang="ko-KR" dirty="0"/>
+              <a:t>. </a:t>
+            </a:r>
+            <a:r>
+              <a:rPr lang="ko-KR" altLang="en-US" dirty="0"/>
+              <a:t>단축키도 있으나</a:t>
+            </a:r>
+            <a:r>
+              <a:rPr lang="en-US" altLang="ko-KR" dirty="0"/>
+              <a:t>, </a:t>
+            </a:r>
+            <a:r>
+              <a:rPr lang="ko-KR" altLang="en-US" dirty="0"/>
+              <a:t>찾아봐야 함</a:t>
+            </a:r>
           </a:p>
         </p:txBody>
       </p:sp>
@@ -3536,6 +3921,959 @@
     <p:extLst>
       <p:ext uri="{BB962C8B-B14F-4D97-AF65-F5344CB8AC3E}">
         <p14:creationId xmlns:p14="http://schemas.microsoft.com/office/powerpoint/2010/main" val="3197153169"/>
+      </p:ext>
+    </p:extLst>
+  </p:cSld>
+  <p:clrMapOvr>
+    <a:masterClrMapping/>
+  </p:clrMapOvr>
+</p:sld>
+</file>
+
+<file path=ppt/slides/slide3.xml><?xml version="1.0" encoding="utf-8"?>
+<p:sld xmlns:a="http://schemas.openxmlformats.org/drawingml/2006/main" xmlns:r="http://schemas.openxmlformats.org/officeDocument/2006/relationships" xmlns:p="http://schemas.openxmlformats.org/presentationml/2006/main">
+  <p:cSld>
+    <p:spTree>
+      <p:nvGrpSpPr>
+        <p:cNvPr id="1" name=""/>
+        <p:cNvGrpSpPr/>
+        <p:nvPr/>
+      </p:nvGrpSpPr>
+      <p:grpSpPr>
+        <a:xfrm>
+          <a:off x="0" y="0"/>
+          <a:ext cx="0" cy="0"/>
+          <a:chOff x="0" y="0"/>
+          <a:chExt cx="0" cy="0"/>
+        </a:xfrm>
+      </p:grpSpPr>
+      <p:sp>
+        <p:nvSpPr>
+          <p:cNvPr id="2" name="제목 1">
+            <a:extLst>
+              <a:ext uri="{FF2B5EF4-FFF2-40B4-BE49-F238E27FC236}">
+                <a16:creationId xmlns:a16="http://schemas.microsoft.com/office/drawing/2014/main" id="{535AB401-14EF-6929-E499-A78A209F39E2}"/>
+              </a:ext>
+            </a:extLst>
+          </p:cNvPr>
+          <p:cNvSpPr>
+            <a:spLocks noGrp="1"/>
+          </p:cNvSpPr>
+          <p:nvPr>
+            <p:ph type="title"/>
+          </p:nvPr>
+        </p:nvSpPr>
+        <p:spPr/>
+        <p:txBody>
+          <a:bodyPr/>
+          <a:lstStyle/>
+          <a:p>
+            <a:r>
+              <a:rPr lang="en-US" altLang="ko-KR" dirty="0"/>
+              <a:t>UI - Image</a:t>
+            </a:r>
+            <a:endParaRPr lang="ko-KR" altLang="en-US" dirty="0"/>
+          </a:p>
+        </p:txBody>
+      </p:sp>
+      <p:sp>
+        <p:nvSpPr>
+          <p:cNvPr id="3" name="내용 개체 틀 2">
+            <a:extLst>
+              <a:ext uri="{FF2B5EF4-FFF2-40B4-BE49-F238E27FC236}">
+                <a16:creationId xmlns:a16="http://schemas.microsoft.com/office/drawing/2014/main" id="{100259CD-C05E-8BFA-C9B8-71D099765EE3}"/>
+              </a:ext>
+            </a:extLst>
+          </p:cNvPr>
+          <p:cNvSpPr>
+            <a:spLocks noGrp="1"/>
+          </p:cNvSpPr>
+          <p:nvPr>
+            <p:ph idx="1"/>
+          </p:nvPr>
+        </p:nvSpPr>
+        <p:spPr>
+          <a:xfrm>
+            <a:off x="567690" y="1825625"/>
+            <a:ext cx="11056620" cy="4351338"/>
+          </a:xfrm>
+        </p:spPr>
+        <p:txBody>
+          <a:bodyPr/>
+          <a:lstStyle/>
+          <a:p>
+            <a:r>
+              <a:rPr lang="en-US" altLang="ko-KR" dirty="0"/>
+              <a:t>RGBA </a:t>
+            </a:r>
+            <a:r>
+              <a:rPr lang="ko-KR" altLang="en-US" dirty="0"/>
+              <a:t>중 </a:t>
+            </a:r>
+            <a:r>
+              <a:rPr lang="en-US" altLang="ko-KR" dirty="0"/>
+              <a:t>A : </a:t>
+            </a:r>
+            <a:r>
+              <a:rPr lang="ko-KR" altLang="en-US" dirty="0"/>
+              <a:t>투명도</a:t>
+            </a:r>
+            <a:r>
+              <a:rPr lang="en-US" altLang="ko-KR" dirty="0"/>
+              <a:t>. </a:t>
+            </a:r>
+            <a:r>
+              <a:rPr lang="ko-KR" altLang="en-US" dirty="0"/>
+              <a:t>이 값을 조절하면 투명도를 조절할 수 있다</a:t>
+            </a:r>
+            <a:r>
+              <a:rPr lang="en-US" altLang="ko-KR" dirty="0"/>
+              <a:t>.</a:t>
+            </a:r>
+          </a:p>
+          <a:p>
+            <a:endParaRPr lang="en-US" altLang="ko-KR" dirty="0"/>
+          </a:p>
+          <a:p>
+            <a:r>
+              <a:rPr lang="en-US" altLang="ko-KR" dirty="0" err="1"/>
+              <a:t>Raycast</a:t>
+            </a:r>
+            <a:r>
+              <a:rPr lang="en-US" altLang="ko-KR" dirty="0"/>
+              <a:t> Target : </a:t>
+            </a:r>
+            <a:r>
+              <a:rPr lang="ko-KR" altLang="en-US" dirty="0"/>
+              <a:t>내가 이미지에 클릭을 하면</a:t>
+            </a:r>
+            <a:r>
+              <a:rPr lang="en-US" altLang="ko-KR" dirty="0"/>
+              <a:t>, </a:t>
+            </a:r>
+            <a:r>
+              <a:rPr lang="ko-KR" altLang="en-US" dirty="0"/>
+              <a:t>어느 곳에 클릭을 했는 지에 대한 정보가 </a:t>
+            </a:r>
+            <a:r>
+              <a:rPr lang="ko-KR" altLang="en-US" dirty="0" err="1"/>
+              <a:t>어딘가에</a:t>
+            </a:r>
+            <a:r>
+              <a:rPr lang="ko-KR" altLang="en-US" dirty="0"/>
+              <a:t> 저장되게 된다</a:t>
+            </a:r>
+            <a:r>
+              <a:rPr lang="en-US" altLang="ko-KR" dirty="0"/>
+              <a:t>. </a:t>
+            </a:r>
+            <a:r>
+              <a:rPr lang="ko-KR" altLang="en-US" dirty="0"/>
+              <a:t>이걸 비활성화</a:t>
+            </a:r>
+            <a:r>
+              <a:rPr lang="en-US" altLang="ko-KR" dirty="0"/>
+              <a:t>(</a:t>
+            </a:r>
+            <a:r>
+              <a:rPr lang="ko-KR" altLang="en-US" dirty="0"/>
+              <a:t>체크해제</a:t>
+            </a:r>
+            <a:r>
+              <a:rPr lang="en-US" altLang="ko-KR" dirty="0"/>
+              <a:t>)</a:t>
+            </a:r>
+            <a:r>
+              <a:rPr lang="ko-KR" altLang="en-US" dirty="0"/>
+              <a:t>하게 되면</a:t>
+            </a:r>
+            <a:r>
+              <a:rPr lang="en-US" altLang="ko-KR" dirty="0"/>
+              <a:t> </a:t>
+            </a:r>
+            <a:r>
+              <a:rPr lang="ko-KR" altLang="en-US" dirty="0"/>
+              <a:t>정보는 저장되지 않는다</a:t>
+            </a:r>
+            <a:r>
+              <a:rPr lang="en-US" altLang="ko-KR" dirty="0"/>
+              <a:t>.</a:t>
+            </a:r>
+            <a:endParaRPr lang="ko-KR" altLang="en-US" dirty="0"/>
+          </a:p>
+        </p:txBody>
+      </p:sp>
+    </p:spTree>
+    <p:extLst>
+      <p:ext uri="{BB962C8B-B14F-4D97-AF65-F5344CB8AC3E}">
+        <p14:creationId xmlns:p14="http://schemas.microsoft.com/office/powerpoint/2010/main" val="2434825662"/>
+      </p:ext>
+    </p:extLst>
+  </p:cSld>
+  <p:clrMapOvr>
+    <a:masterClrMapping/>
+  </p:clrMapOvr>
+</p:sld>
+</file>
+
+<file path=ppt/slides/slide4.xml><?xml version="1.0" encoding="utf-8"?>
+<p:sld xmlns:a="http://schemas.openxmlformats.org/drawingml/2006/main" xmlns:r="http://schemas.openxmlformats.org/officeDocument/2006/relationships" xmlns:p="http://schemas.openxmlformats.org/presentationml/2006/main">
+  <p:cSld>
+    <p:spTree>
+      <p:nvGrpSpPr>
+        <p:cNvPr id="1" name=""/>
+        <p:cNvGrpSpPr/>
+        <p:nvPr/>
+      </p:nvGrpSpPr>
+      <p:grpSpPr>
+        <a:xfrm>
+          <a:off x="0" y="0"/>
+          <a:ext cx="0" cy="0"/>
+          <a:chOff x="0" y="0"/>
+          <a:chExt cx="0" cy="0"/>
+        </a:xfrm>
+      </p:grpSpPr>
+      <p:sp>
+        <p:nvSpPr>
+          <p:cNvPr id="2" name="제목 1">
+            <a:extLst>
+              <a:ext uri="{FF2B5EF4-FFF2-40B4-BE49-F238E27FC236}">
+                <a16:creationId xmlns:a16="http://schemas.microsoft.com/office/drawing/2014/main" id="{C6E2C465-F1D8-AB20-D10D-FF1DE8499B6A}"/>
+              </a:ext>
+            </a:extLst>
+          </p:cNvPr>
+          <p:cNvSpPr>
+            <a:spLocks noGrp="1"/>
+          </p:cNvSpPr>
+          <p:nvPr>
+            <p:ph type="title"/>
+          </p:nvPr>
+        </p:nvSpPr>
+        <p:spPr/>
+        <p:txBody>
+          <a:bodyPr/>
+          <a:lstStyle/>
+          <a:p>
+            <a:r>
+              <a:rPr lang="en-US" altLang="ko-KR" dirty="0" err="1"/>
+              <a:t>TextMeshPro</a:t>
+            </a:r>
+            <a:endParaRPr lang="ko-KR" altLang="en-US" dirty="0"/>
+          </a:p>
+        </p:txBody>
+      </p:sp>
+      <p:sp>
+        <p:nvSpPr>
+          <p:cNvPr id="3" name="내용 개체 틀 2">
+            <a:extLst>
+              <a:ext uri="{FF2B5EF4-FFF2-40B4-BE49-F238E27FC236}">
+                <a16:creationId xmlns:a16="http://schemas.microsoft.com/office/drawing/2014/main" id="{B6A03E72-1064-C060-66CA-262A63EA014C}"/>
+              </a:ext>
+            </a:extLst>
+          </p:cNvPr>
+          <p:cNvSpPr>
+            <a:spLocks noGrp="1"/>
+          </p:cNvSpPr>
+          <p:nvPr>
+            <p:ph idx="1"/>
+          </p:nvPr>
+        </p:nvSpPr>
+        <p:spPr/>
+        <p:txBody>
+          <a:bodyPr/>
+          <a:lstStyle/>
+          <a:p>
+            <a:r>
+              <a:rPr lang="en-US" altLang="ko-KR" dirty="0"/>
+              <a:t>Auto Size : </a:t>
+            </a:r>
+            <a:r>
+              <a:rPr lang="ko-KR" altLang="en-US" dirty="0"/>
+              <a:t>활성화하면 </a:t>
+            </a:r>
+            <a:r>
+              <a:rPr lang="ko-KR" altLang="en-US" dirty="0" err="1"/>
+              <a:t>렉</a:t>
+            </a:r>
+            <a:r>
+              <a:rPr lang="ko-KR" altLang="en-US" dirty="0"/>
+              <a:t> 툴로 크기를 조정하는 대로 글자 크기도 커졌다 작아졌다 한다</a:t>
+            </a:r>
+            <a:r>
+              <a:rPr lang="en-US" altLang="ko-KR" dirty="0"/>
+              <a:t>. Max</a:t>
+            </a:r>
+            <a:r>
+              <a:rPr lang="ko-KR" altLang="en-US" dirty="0"/>
+              <a:t>와 </a:t>
+            </a:r>
+            <a:r>
+              <a:rPr lang="en-US" altLang="ko-KR" dirty="0"/>
+              <a:t>Min</a:t>
+            </a:r>
+            <a:r>
+              <a:rPr lang="ko-KR" altLang="en-US" dirty="0"/>
+              <a:t>으로 최소 글자 크기와 최대 글자 크기를 정할 수 있다</a:t>
+            </a:r>
+            <a:r>
+              <a:rPr lang="en-US" altLang="ko-KR" dirty="0"/>
+              <a:t>.</a:t>
+            </a:r>
+          </a:p>
+          <a:p>
+            <a:endParaRPr lang="en-US" altLang="ko-KR" dirty="0"/>
+          </a:p>
+          <a:p>
+            <a:r>
+              <a:rPr lang="en-US" altLang="ko-KR" dirty="0"/>
+              <a:t>Alignment : </a:t>
+            </a:r>
+            <a:r>
+              <a:rPr lang="ko-KR" altLang="en-US" dirty="0"/>
+              <a:t>정렬 관련</a:t>
+            </a:r>
+          </a:p>
+        </p:txBody>
+      </p:sp>
+    </p:spTree>
+    <p:extLst>
+      <p:ext uri="{BB962C8B-B14F-4D97-AF65-F5344CB8AC3E}">
+        <p14:creationId xmlns:p14="http://schemas.microsoft.com/office/powerpoint/2010/main" val="1455306431"/>
+      </p:ext>
+    </p:extLst>
+  </p:cSld>
+  <p:clrMapOvr>
+    <a:masterClrMapping/>
+  </p:clrMapOvr>
+</p:sld>
+</file>
+
+<file path=ppt/slides/slide5.xml><?xml version="1.0" encoding="utf-8"?>
+<p:sld xmlns:a="http://schemas.openxmlformats.org/drawingml/2006/main" xmlns:r="http://schemas.openxmlformats.org/officeDocument/2006/relationships" xmlns:p="http://schemas.openxmlformats.org/presentationml/2006/main">
+  <p:cSld>
+    <p:spTree>
+      <p:nvGrpSpPr>
+        <p:cNvPr id="1" name=""/>
+        <p:cNvGrpSpPr/>
+        <p:nvPr/>
+      </p:nvGrpSpPr>
+      <p:grpSpPr>
+        <a:xfrm>
+          <a:off x="0" y="0"/>
+          <a:ext cx="0" cy="0"/>
+          <a:chOff x="0" y="0"/>
+          <a:chExt cx="0" cy="0"/>
+        </a:xfrm>
+      </p:grpSpPr>
+      <p:sp>
+        <p:nvSpPr>
+          <p:cNvPr id="2" name="제목 1">
+            <a:extLst>
+              <a:ext uri="{FF2B5EF4-FFF2-40B4-BE49-F238E27FC236}">
+                <a16:creationId xmlns:a16="http://schemas.microsoft.com/office/drawing/2014/main" id="{5367CB9D-071D-7DB7-E18C-9890BE5C8055}"/>
+              </a:ext>
+            </a:extLst>
+          </p:cNvPr>
+          <p:cNvSpPr>
+            <a:spLocks noGrp="1"/>
+          </p:cNvSpPr>
+          <p:nvPr>
+            <p:ph type="title"/>
+          </p:nvPr>
+        </p:nvSpPr>
+        <p:spPr/>
+        <p:txBody>
+          <a:bodyPr/>
+          <a:lstStyle/>
+          <a:p>
+            <a:r>
+              <a:rPr lang="en-US" altLang="ko-KR" dirty="0"/>
+              <a:t>UI </a:t>
+            </a:r>
+            <a:r>
+              <a:rPr lang="ko-KR" altLang="en-US" dirty="0"/>
+              <a:t>스크립트</a:t>
+            </a:r>
+          </a:p>
+        </p:txBody>
+      </p:sp>
+      <p:sp>
+        <p:nvSpPr>
+          <p:cNvPr id="3" name="내용 개체 틀 2">
+            <a:extLst>
+              <a:ext uri="{FF2B5EF4-FFF2-40B4-BE49-F238E27FC236}">
+                <a16:creationId xmlns:a16="http://schemas.microsoft.com/office/drawing/2014/main" id="{FE00A7BE-59B8-A631-2F45-CFE7DEECEAD2}"/>
+              </a:ext>
+            </a:extLst>
+          </p:cNvPr>
+          <p:cNvSpPr>
+            <a:spLocks noGrp="1"/>
+          </p:cNvSpPr>
+          <p:nvPr>
+            <p:ph idx="1"/>
+          </p:nvPr>
+        </p:nvSpPr>
+        <p:spPr/>
+        <p:txBody>
+          <a:bodyPr/>
+          <a:lstStyle/>
+          <a:p>
+            <a:r>
+              <a:rPr lang="ko-KR" altLang="en-US" dirty="0"/>
+              <a:t>함수 이름 앞에 </a:t>
+            </a:r>
+            <a:r>
+              <a:rPr lang="en-US" altLang="ko-KR" dirty="0"/>
+              <a:t>On</a:t>
+            </a:r>
+            <a:r>
+              <a:rPr lang="ko-KR" altLang="en-US" dirty="0"/>
+              <a:t>을 붙이는 이유 </a:t>
+            </a:r>
+            <a:r>
+              <a:rPr lang="en-US" altLang="ko-KR" dirty="0"/>
+              <a:t>: </a:t>
+            </a:r>
+            <a:r>
+              <a:rPr lang="ko-KR" altLang="en-US" dirty="0"/>
+              <a:t>이벤트로서 호출되는 함수일 경우 </a:t>
+            </a:r>
+            <a:r>
+              <a:rPr lang="en-US" altLang="ko-KR" dirty="0"/>
+              <a:t>On</a:t>
+            </a:r>
+            <a:r>
+              <a:rPr lang="ko-KR" altLang="en-US" dirty="0"/>
+              <a:t>을 붙이는 경우가 많다</a:t>
+            </a:r>
+            <a:r>
+              <a:rPr lang="en-US" altLang="ko-KR" dirty="0"/>
+              <a:t>.</a:t>
+            </a:r>
+          </a:p>
+          <a:p>
+            <a:endParaRPr lang="en-US" altLang="ko-KR" dirty="0"/>
+          </a:p>
+          <a:p>
+            <a:r>
+              <a:rPr lang="ko-KR" altLang="en-US" dirty="0"/>
+              <a:t>빈 </a:t>
+            </a:r>
+            <a:r>
+              <a:rPr lang="ko-KR" altLang="en-US" dirty="0" err="1"/>
+              <a:t>게임오브젝트를</a:t>
+            </a:r>
+            <a:r>
+              <a:rPr lang="ko-KR" altLang="en-US" dirty="0"/>
+              <a:t> 만들어서 거기에 스크립트를 넣어준다</a:t>
+            </a:r>
+            <a:r>
+              <a:rPr lang="en-US" altLang="ko-KR" dirty="0"/>
+              <a:t>.</a:t>
+            </a:r>
+          </a:p>
+          <a:p>
+            <a:r>
+              <a:rPr lang="ko-KR" altLang="en-US" dirty="0"/>
+              <a:t>그리고 이벤트를 넣어줄 버튼의 </a:t>
+            </a:r>
+            <a:r>
+              <a:rPr lang="ko-KR" altLang="en-US" dirty="0" err="1"/>
+              <a:t>인스펙터에</a:t>
+            </a:r>
+            <a:r>
+              <a:rPr lang="ko-KR" altLang="en-US" dirty="0"/>
+              <a:t> </a:t>
+            </a:r>
+            <a:r>
+              <a:rPr lang="en-US" altLang="ko-KR" dirty="0"/>
+              <a:t>‘On Click ()’</a:t>
+            </a:r>
+            <a:r>
+              <a:rPr lang="ko-KR" altLang="en-US" dirty="0"/>
+              <a:t>에 </a:t>
+            </a:r>
+            <a:r>
+              <a:rPr lang="en-US" altLang="ko-KR" dirty="0"/>
+              <a:t>‘+’</a:t>
+            </a:r>
+            <a:r>
+              <a:rPr lang="ko-KR" altLang="en-US" dirty="0"/>
+              <a:t>를 눌러준 후</a:t>
+            </a:r>
+            <a:r>
+              <a:rPr lang="en-US" altLang="ko-KR" dirty="0"/>
+              <a:t>, ‘None </a:t>
+            </a:r>
+            <a:r>
+              <a:rPr lang="ko-KR" altLang="en-US" dirty="0"/>
+              <a:t>어쩌고</a:t>
+            </a:r>
+            <a:r>
+              <a:rPr lang="en-US" altLang="ko-KR" dirty="0"/>
+              <a:t>’ </a:t>
+            </a:r>
+            <a:r>
+              <a:rPr lang="ko-KR" altLang="en-US" dirty="0"/>
+              <a:t>부분에 새로 만든 빈 </a:t>
+            </a:r>
+            <a:r>
+              <a:rPr lang="ko-KR" altLang="en-US" dirty="0" err="1"/>
+              <a:t>게임오브젝트를</a:t>
+            </a:r>
+            <a:r>
+              <a:rPr lang="ko-KR" altLang="en-US" dirty="0"/>
+              <a:t> 넣어준다</a:t>
+            </a:r>
+            <a:r>
+              <a:rPr lang="en-US" altLang="ko-KR" dirty="0"/>
+              <a:t>. </a:t>
+            </a:r>
+            <a:r>
+              <a:rPr lang="ko-KR" altLang="en-US" dirty="0"/>
+              <a:t>그리고 </a:t>
+            </a:r>
+            <a:r>
+              <a:rPr lang="en-US" altLang="ko-KR" dirty="0"/>
+              <a:t>‘Function </a:t>
+            </a:r>
+            <a:r>
+              <a:rPr lang="ko-KR" altLang="en-US" dirty="0"/>
+              <a:t>어쩌고</a:t>
+            </a:r>
+            <a:r>
+              <a:rPr lang="en-US" altLang="ko-KR" dirty="0"/>
+              <a:t>’</a:t>
+            </a:r>
+            <a:r>
+              <a:rPr lang="ko-KR" altLang="en-US" dirty="0"/>
+              <a:t> 부분에 우리가 만든 스크립트 이름을 찾아서 넣고 싶은 함수 이름을 클릭해서 넣어준다</a:t>
+            </a:r>
+            <a:r>
+              <a:rPr lang="en-US" altLang="ko-KR" dirty="0"/>
+              <a:t>.</a:t>
+            </a:r>
+            <a:endParaRPr lang="ko-KR" altLang="en-US" dirty="0"/>
+          </a:p>
+        </p:txBody>
+      </p:sp>
+    </p:spTree>
+    <p:extLst>
+      <p:ext uri="{BB962C8B-B14F-4D97-AF65-F5344CB8AC3E}">
+        <p14:creationId xmlns:p14="http://schemas.microsoft.com/office/powerpoint/2010/main" val="678700671"/>
+      </p:ext>
+    </p:extLst>
+  </p:cSld>
+  <p:clrMapOvr>
+    <a:masterClrMapping/>
+  </p:clrMapOvr>
+</p:sld>
+</file>
+
+<file path=ppt/slides/slide6.xml><?xml version="1.0" encoding="utf-8"?>
+<p:sld xmlns:a="http://schemas.openxmlformats.org/drawingml/2006/main" xmlns:r="http://schemas.openxmlformats.org/officeDocument/2006/relationships" xmlns:p="http://schemas.openxmlformats.org/presentationml/2006/main">
+  <p:cSld>
+    <p:spTree>
+      <p:nvGrpSpPr>
+        <p:cNvPr id="1" name=""/>
+        <p:cNvGrpSpPr/>
+        <p:nvPr/>
+      </p:nvGrpSpPr>
+      <p:grpSpPr>
+        <a:xfrm>
+          <a:off x="0" y="0"/>
+          <a:ext cx="0" cy="0"/>
+          <a:chOff x="0" y="0"/>
+          <a:chExt cx="0" cy="0"/>
+        </a:xfrm>
+      </p:grpSpPr>
+      <p:sp>
+        <p:nvSpPr>
+          <p:cNvPr id="2" name="제목 1">
+            <a:extLst>
+              <a:ext uri="{FF2B5EF4-FFF2-40B4-BE49-F238E27FC236}">
+                <a16:creationId xmlns:a16="http://schemas.microsoft.com/office/drawing/2014/main" id="{C13CFDDF-626F-5969-4F67-F1C0C6BE2B13}"/>
+              </a:ext>
+            </a:extLst>
+          </p:cNvPr>
+          <p:cNvSpPr>
+            <a:spLocks noGrp="1"/>
+          </p:cNvSpPr>
+          <p:nvPr>
+            <p:ph type="title"/>
+          </p:nvPr>
+        </p:nvSpPr>
+        <p:spPr/>
+        <p:txBody>
+          <a:bodyPr/>
+          <a:lstStyle/>
+          <a:p>
+            <a:r>
+              <a:rPr lang="ko-KR" altLang="en-US" dirty="0"/>
+              <a:t>관리</a:t>
+            </a:r>
+          </a:p>
+        </p:txBody>
+      </p:sp>
+      <p:sp>
+        <p:nvSpPr>
+          <p:cNvPr id="3" name="내용 개체 틀 2">
+            <a:extLst>
+              <a:ext uri="{FF2B5EF4-FFF2-40B4-BE49-F238E27FC236}">
+                <a16:creationId xmlns:a16="http://schemas.microsoft.com/office/drawing/2014/main" id="{D3F0A463-6051-52BB-881B-DF52B50D5C4B}"/>
+              </a:ext>
+            </a:extLst>
+          </p:cNvPr>
+          <p:cNvSpPr>
+            <a:spLocks noGrp="1"/>
+          </p:cNvSpPr>
+          <p:nvPr>
+            <p:ph idx="1"/>
+          </p:nvPr>
+        </p:nvSpPr>
+        <p:spPr/>
+        <p:txBody>
+          <a:bodyPr/>
+          <a:lstStyle/>
+          <a:p>
+            <a:r>
+              <a:rPr lang="ko-KR" altLang="en-US" dirty="0"/>
+              <a:t>같은 성격의 오브젝트들은 하나로 묶어서 관리하는 게 편하다</a:t>
+            </a:r>
+            <a:r>
+              <a:rPr lang="en-US" altLang="ko-KR" dirty="0"/>
+              <a:t>.</a:t>
+            </a:r>
+          </a:p>
+          <a:p>
+            <a:r>
+              <a:rPr lang="ko-KR" altLang="en-US" dirty="0"/>
+              <a:t>예를 들면</a:t>
+            </a:r>
+            <a:r>
+              <a:rPr lang="en-US" altLang="ko-KR" dirty="0"/>
+              <a:t>, </a:t>
+            </a:r>
+            <a:r>
+              <a:rPr lang="ko-KR" altLang="en-US" dirty="0"/>
+              <a:t>버튼들은 모두 버튼이므로</a:t>
+            </a:r>
+            <a:r>
+              <a:rPr lang="en-US" altLang="ko-KR" dirty="0"/>
+              <a:t>, </a:t>
+            </a:r>
+            <a:r>
+              <a:rPr lang="ko-KR" altLang="en-US" dirty="0"/>
+              <a:t>하나의 그룹으로 묶어서 관리하면 좋다</a:t>
+            </a:r>
+            <a:r>
+              <a:rPr lang="en-US" altLang="ko-KR" dirty="0"/>
+              <a:t>.</a:t>
+            </a:r>
+          </a:p>
+          <a:p>
+            <a:endParaRPr lang="en-US" altLang="ko-KR" dirty="0"/>
+          </a:p>
+          <a:p>
+            <a:r>
+              <a:rPr lang="en-US" altLang="ko-KR" dirty="0"/>
+              <a:t>UI </a:t>
+            </a:r>
+            <a:r>
+              <a:rPr lang="ko-KR" altLang="en-US" dirty="0"/>
+              <a:t>오브젝트들은 </a:t>
+            </a:r>
+            <a:r>
+              <a:rPr lang="ko-KR" altLang="en-US" dirty="0" err="1"/>
+              <a:t>인스펙터에</a:t>
+            </a:r>
+            <a:r>
+              <a:rPr lang="ko-KR" altLang="en-US" dirty="0"/>
+              <a:t> </a:t>
+            </a:r>
+            <a:r>
+              <a:rPr lang="en-US" altLang="ko-KR" dirty="0"/>
+              <a:t>‘Transform’</a:t>
+            </a:r>
+            <a:r>
+              <a:rPr lang="ko-KR" altLang="en-US" dirty="0"/>
+              <a:t>을</a:t>
+            </a:r>
+            <a:r>
+              <a:rPr lang="en-US" altLang="ko-KR" dirty="0"/>
+              <a:t> </a:t>
+            </a:r>
+            <a:r>
+              <a:rPr lang="ko-KR" altLang="en-US" dirty="0"/>
+              <a:t>가지면 안 되고</a:t>
+            </a:r>
+            <a:r>
+              <a:rPr lang="en-US" altLang="ko-KR" dirty="0"/>
+              <a:t>, ‘</a:t>
+            </a:r>
+            <a:r>
+              <a:rPr lang="en-US" altLang="ko-KR" dirty="0" err="1"/>
+              <a:t>Rect</a:t>
+            </a:r>
+            <a:r>
+              <a:rPr lang="en-US" altLang="ko-KR" dirty="0"/>
+              <a:t> Transform’</a:t>
+            </a:r>
+            <a:r>
+              <a:rPr lang="ko-KR" altLang="en-US" dirty="0"/>
+              <a:t>을 가져야 하므로</a:t>
+            </a:r>
+            <a:r>
+              <a:rPr lang="en-US" altLang="ko-KR" dirty="0"/>
+              <a:t>, </a:t>
+            </a:r>
+            <a:r>
+              <a:rPr lang="ko-KR" altLang="en-US" dirty="0"/>
+              <a:t>빈 게임 오브젝트를 생성할 때도 </a:t>
+            </a:r>
+            <a:r>
+              <a:rPr lang="en-US" altLang="ko-KR" dirty="0"/>
+              <a:t>Canvas</a:t>
+            </a:r>
+            <a:r>
+              <a:rPr lang="ko-KR" altLang="en-US" dirty="0"/>
+              <a:t>를 </a:t>
+            </a:r>
+            <a:r>
+              <a:rPr lang="ko-KR" altLang="en-US" dirty="0" err="1"/>
+              <a:t>우클릭해서</a:t>
+            </a:r>
+            <a:r>
+              <a:rPr lang="ko-KR" altLang="en-US" dirty="0"/>
+              <a:t> 만들어주면 좋다</a:t>
+            </a:r>
+            <a:r>
+              <a:rPr lang="en-US" altLang="ko-KR" dirty="0"/>
+              <a:t>.</a:t>
+            </a:r>
+            <a:endParaRPr lang="ko-KR" altLang="en-US" dirty="0"/>
+          </a:p>
+        </p:txBody>
+      </p:sp>
+    </p:spTree>
+    <p:extLst>
+      <p:ext uri="{BB962C8B-B14F-4D97-AF65-F5344CB8AC3E}">
+        <p14:creationId xmlns:p14="http://schemas.microsoft.com/office/powerpoint/2010/main" val="1572706785"/>
+      </p:ext>
+    </p:extLst>
+  </p:cSld>
+  <p:clrMapOvr>
+    <a:masterClrMapping/>
+  </p:clrMapOvr>
+</p:sld>
+</file>
+
+<file path=ppt/slides/slide7.xml><?xml version="1.0" encoding="utf-8"?>
+<p:sld xmlns:a="http://schemas.openxmlformats.org/drawingml/2006/main" xmlns:r="http://schemas.openxmlformats.org/officeDocument/2006/relationships" xmlns:p="http://schemas.openxmlformats.org/presentationml/2006/main">
+  <p:cSld>
+    <p:spTree>
+      <p:nvGrpSpPr>
+        <p:cNvPr id="1" name=""/>
+        <p:cNvGrpSpPr/>
+        <p:nvPr/>
+      </p:nvGrpSpPr>
+      <p:grpSpPr>
+        <a:xfrm>
+          <a:off x="0" y="0"/>
+          <a:ext cx="0" cy="0"/>
+          <a:chOff x="0" y="0"/>
+          <a:chExt cx="0" cy="0"/>
+        </a:xfrm>
+      </p:grpSpPr>
+      <p:sp>
+        <p:nvSpPr>
+          <p:cNvPr id="2" name="제목 1">
+            <a:extLst>
+              <a:ext uri="{FF2B5EF4-FFF2-40B4-BE49-F238E27FC236}">
+                <a16:creationId xmlns:a16="http://schemas.microsoft.com/office/drawing/2014/main" id="{1D3DC655-7E31-4E15-22B8-4B542CB1555A}"/>
+              </a:ext>
+            </a:extLst>
+          </p:cNvPr>
+          <p:cNvSpPr>
+            <a:spLocks noGrp="1"/>
+          </p:cNvSpPr>
+          <p:nvPr>
+            <p:ph type="title"/>
+          </p:nvPr>
+        </p:nvSpPr>
+        <p:spPr/>
+        <p:txBody>
+          <a:bodyPr/>
+          <a:lstStyle/>
+          <a:p>
+            <a:r>
+              <a:rPr lang="ko-KR" altLang="en-US" dirty="0"/>
+              <a:t>버튼을 하나의 그룹으로 관리</a:t>
+            </a:r>
+          </a:p>
+        </p:txBody>
+      </p:sp>
+      <p:sp>
+        <p:nvSpPr>
+          <p:cNvPr id="3" name="내용 개체 틀 2">
+            <a:extLst>
+              <a:ext uri="{FF2B5EF4-FFF2-40B4-BE49-F238E27FC236}">
+                <a16:creationId xmlns:a16="http://schemas.microsoft.com/office/drawing/2014/main" id="{26E9613B-D2AF-133E-9B48-1E4B055B7AA9}"/>
+              </a:ext>
+            </a:extLst>
+          </p:cNvPr>
+          <p:cNvSpPr>
+            <a:spLocks noGrp="1"/>
+          </p:cNvSpPr>
+          <p:nvPr>
+            <p:ph idx="1"/>
+          </p:nvPr>
+        </p:nvSpPr>
+        <p:spPr/>
+        <p:txBody>
+          <a:bodyPr/>
+          <a:lstStyle/>
+          <a:p>
+            <a:r>
+              <a:rPr lang="ko-KR" altLang="en-US" dirty="0" err="1"/>
+              <a:t>인스펙터에</a:t>
+            </a:r>
+            <a:r>
+              <a:rPr lang="ko-KR" altLang="en-US" dirty="0"/>
+              <a:t> </a:t>
+            </a:r>
+            <a:r>
+              <a:rPr lang="en-US" altLang="ko-KR" dirty="0"/>
+              <a:t>Image</a:t>
+            </a:r>
+            <a:r>
+              <a:rPr lang="ko-KR" altLang="en-US" dirty="0"/>
+              <a:t>를 넣어서 이미지 속성을 넣어줄 수 있다</a:t>
+            </a:r>
+            <a:r>
+              <a:rPr lang="en-US" altLang="ko-KR" dirty="0"/>
+              <a:t>.</a:t>
+            </a:r>
+          </a:p>
+          <a:p>
+            <a:endParaRPr lang="en-US" altLang="ko-KR" dirty="0"/>
+          </a:p>
+          <a:p>
+            <a:r>
+              <a:rPr lang="en-US" altLang="ko-KR" dirty="0"/>
+              <a:t>Vertical Layout Group : </a:t>
+            </a:r>
+            <a:r>
+              <a:rPr lang="ko-KR" altLang="en-US" dirty="0"/>
+              <a:t>수직으로 하위 오브젝트들을 관리해줌</a:t>
+            </a:r>
+            <a:endParaRPr lang="en-US" altLang="ko-KR" dirty="0"/>
+          </a:p>
+        </p:txBody>
+      </p:sp>
+    </p:spTree>
+    <p:extLst>
+      <p:ext uri="{BB962C8B-B14F-4D97-AF65-F5344CB8AC3E}">
+        <p14:creationId xmlns:p14="http://schemas.microsoft.com/office/powerpoint/2010/main" val="3430836320"/>
+      </p:ext>
+    </p:extLst>
+  </p:cSld>
+  <p:clrMapOvr>
+    <a:masterClrMapping/>
+  </p:clrMapOvr>
+</p:sld>
+</file>
+
+<file path=ppt/slides/slide8.xml><?xml version="1.0" encoding="utf-8"?>
+<p:sld xmlns:a="http://schemas.openxmlformats.org/drawingml/2006/main" xmlns:r="http://schemas.openxmlformats.org/officeDocument/2006/relationships" xmlns:p="http://schemas.openxmlformats.org/presentationml/2006/main">
+  <p:cSld>
+    <p:spTree>
+      <p:nvGrpSpPr>
+        <p:cNvPr id="1" name=""/>
+        <p:cNvGrpSpPr/>
+        <p:nvPr/>
+      </p:nvGrpSpPr>
+      <p:grpSpPr>
+        <a:xfrm>
+          <a:off x="0" y="0"/>
+          <a:ext cx="0" cy="0"/>
+          <a:chOff x="0" y="0"/>
+          <a:chExt cx="0" cy="0"/>
+        </a:xfrm>
+      </p:grpSpPr>
+      <p:sp>
+        <p:nvSpPr>
+          <p:cNvPr id="2" name="제목 1">
+            <a:extLst>
+              <a:ext uri="{FF2B5EF4-FFF2-40B4-BE49-F238E27FC236}">
+                <a16:creationId xmlns:a16="http://schemas.microsoft.com/office/drawing/2014/main" id="{D9DA8B8B-9901-E00B-3E8B-2E849C9BB149}"/>
+              </a:ext>
+            </a:extLst>
+          </p:cNvPr>
+          <p:cNvSpPr>
+            <a:spLocks noGrp="1"/>
+          </p:cNvSpPr>
+          <p:nvPr>
+            <p:ph type="title"/>
+          </p:nvPr>
+        </p:nvSpPr>
+        <p:spPr/>
+        <p:txBody>
+          <a:bodyPr/>
+          <a:lstStyle/>
+          <a:p>
+            <a:r>
+              <a:rPr lang="ko-KR" altLang="en-US" dirty="0" err="1"/>
+              <a:t>베르</a:t>
+            </a:r>
+            <a:r>
+              <a:rPr lang="ko-KR" altLang="en-US" dirty="0"/>
+              <a:t> </a:t>
+            </a:r>
+            <a:r>
+              <a:rPr lang="en-US" altLang="ko-KR" dirty="0"/>
+              <a:t>UI</a:t>
+            </a:r>
+            <a:endParaRPr lang="ko-KR" altLang="en-US" dirty="0"/>
+          </a:p>
+        </p:txBody>
+      </p:sp>
+      <p:sp>
+        <p:nvSpPr>
+          <p:cNvPr id="3" name="내용 개체 틀 2">
+            <a:extLst>
+              <a:ext uri="{FF2B5EF4-FFF2-40B4-BE49-F238E27FC236}">
+                <a16:creationId xmlns:a16="http://schemas.microsoft.com/office/drawing/2014/main" id="{5F5E4B54-53D2-FF3C-F5BB-D900EA054073}"/>
+              </a:ext>
+            </a:extLst>
+          </p:cNvPr>
+          <p:cNvSpPr>
+            <a:spLocks noGrp="1"/>
+          </p:cNvSpPr>
+          <p:nvPr>
+            <p:ph idx="1"/>
+          </p:nvPr>
+        </p:nvSpPr>
+        <p:spPr/>
+        <p:txBody>
+          <a:bodyPr/>
+          <a:lstStyle/>
+          <a:p>
+            <a:r>
+              <a:rPr lang="en-US" altLang="ko-KR" dirty="0"/>
+              <a:t>UI </a:t>
+            </a:r>
+            <a:r>
+              <a:rPr lang="ko-KR" altLang="en-US" dirty="0"/>
+              <a:t>관련 유투브 강의</a:t>
+            </a:r>
+          </a:p>
+        </p:txBody>
+      </p:sp>
+    </p:spTree>
+    <p:extLst>
+      <p:ext uri="{BB962C8B-B14F-4D97-AF65-F5344CB8AC3E}">
+        <p14:creationId xmlns:p14="http://schemas.microsoft.com/office/powerpoint/2010/main" val="2663456249"/>
       </p:ext>
     </p:extLst>
   </p:cSld>
